--- a/docs/presentation/defense_presentation.pptx
+++ b/docs/presentation/defense_presentation.pptx
@@ -3102,19 +3102,29 @@
       <p:grpSpPr/>
       <p:sp>
         <p:nvSpPr>
-          <p:cNvPr id="2" name="Title 1"/>
-          <p:cNvSpPr>
-            <a:spLocks noGrp="1"/>
-          </p:cNvSpPr>
-          <p:nvPr>
-            <p:ph type="ctrTitle"/>
-          </p:nvPr>
-        </p:nvSpPr>
-        <p:spPr/>
-        <p:txBody>
-          <a:bodyPr/>
-          <a:lstStyle/>
-          <a:p>
+          <p:cNvPr id="2" name="TextBox 1"/>
+          <p:cNvSpPr txBox="1"/>
+          <p:nvPr/>
+        </p:nvSpPr>
+        <p:spPr>
+          <a:xfrm>
+            <a:off x="640080" y="822960"/>
+            <a:ext cx="10881360" cy="2377440"/>
+          </a:xfrm>
+          <a:prstGeom prst="rect">
+            <a:avLst/>
+          </a:prstGeom>
+          <a:noFill/>
+        </p:spPr>
+        <p:txBody>
+          <a:bodyPr wrap="square">
+            <a:spAutoFit/>
+          </a:bodyPr>
+          <a:lstStyle/>
+          <a:p>
+            <a:pPr>
+              <a:defRPr sz="3200"/>
+            </a:pPr>
             <a:r>
               <a:t>Исследование помехоустойчивости кодов Хэмминга и свёрточных кодов при передаче данных по каналу с шумом</a:t>
             </a:r>
@@ -3123,21 +3133,78 @@
       </p:sp>
       <p:sp>
         <p:nvSpPr>
-          <p:cNvPr id="3" name="Subtitle 2"/>
-          <p:cNvSpPr>
-            <a:spLocks noGrp="1"/>
-          </p:cNvSpPr>
-          <p:nvPr>
-            <p:ph type="subTitle" idx="1"/>
-          </p:nvPr>
-        </p:nvSpPr>
-        <p:spPr/>
-        <p:txBody>
-          <a:bodyPr/>
-          <a:lstStyle/>
-          <a:p>
+          <p:cNvPr id="3" name="TextBox 2"/>
+          <p:cNvSpPr txBox="1"/>
+          <p:nvPr/>
+        </p:nvSpPr>
+        <p:spPr>
+          <a:xfrm>
+            <a:off x="640080" y="3474720"/>
+            <a:ext cx="10881360" cy="1097280"/>
+          </a:xfrm>
+          <a:prstGeom prst="rect">
+            <a:avLst/>
+          </a:prstGeom>
+          <a:noFill/>
+        </p:spPr>
+        <p:txBody>
+          <a:bodyPr wrap="square">
+            <a:spAutoFit/>
+          </a:bodyPr>
+          <a:lstStyle/>
+          <a:p>
+            <a:pPr>
+              <a:defRPr sz="2000"/>
+            </a:pPr>
             <a:r>
               <a:t>Блочный код Хэмминга (7,4) и свёрточный код (7,5)₈ с декодированием по Витерби в канале BPSK + AWGN</a:t>
+            </a:r>
+          </a:p>
+        </p:txBody>
+      </p:sp>
+      <p:sp>
+        <p:nvSpPr>
+          <p:cNvPr id="4" name="TextBox 3"/>
+          <p:cNvSpPr txBox="1"/>
+          <p:nvPr/>
+        </p:nvSpPr>
+        <p:spPr>
+          <a:xfrm>
+            <a:off x="7863840" y="5532120"/>
+            <a:ext cx="3840480" cy="1143000"/>
+          </a:xfrm>
+          <a:prstGeom prst="rect">
+            <a:avLst/>
+          </a:prstGeom>
+          <a:noFill/>
+        </p:spPr>
+        <p:txBody>
+          <a:bodyPr wrap="square">
+            <a:spAutoFit/>
+          </a:bodyPr>
+          <a:lstStyle/>
+          <a:p>
+            <a:pPr>
+              <a:defRPr sz="1600"/>
+            </a:pPr>
+            <a:r>
+              <a:t>Работу выполнил</a:t>
+            </a:r>
+          </a:p>
+          <a:p>
+            <a:pPr>
+              <a:defRPr sz="1600"/>
+            </a:pPr>
+            <a:r>
+              <a:t>Студент группы 11ОБ-397</a:t>
+            </a:r>
+          </a:p>
+          <a:p>
+            <a:pPr>
+              <a:defRPr sz="1600"/>
+            </a:pPr>
+            <a:r>
+              <a:t>Чурсин А.В.</a:t>
             </a:r>
           </a:p>
         </p:txBody>

--- a/docs/presentation/defense_presentation.pptx
+++ b/docs/presentation/defense_presentation.pptx
@@ -18,6 +18,9 @@
     <p:sldId id="266" r:id="rId17"/>
     <p:sldId id="267" r:id="rId18"/>
     <p:sldId id="268" r:id="rId19"/>
+    <p:sldId id="269" r:id="rId20"/>
+    <p:sldId id="270" r:id="rId21"/>
+    <p:sldId id="271" r:id="rId22"/>
   </p:sldIdLst>
   <p:sldSz cx="12191695" cy="6858000" type="screen4x3"/>
   <p:notesSz cx="6858000" cy="9144000"/>
@@ -3488,6 +3491,267 @@
           <a:lstStyle/>
           <a:p>
             <a:r>
+              <a:t>Вопросы преподавателя: реализация (вопрос — ответ)</a:t>
+            </a:r>
+          </a:p>
+        </p:txBody>
+      </p:sp>
+      <p:sp>
+        <p:nvSpPr>
+          <p:cNvPr id="3" name="Content Placeholder 2"/>
+          <p:cNvSpPr>
+            <a:spLocks noGrp="1"/>
+          </p:cNvSpPr>
+          <p:nvPr>
+            <p:ph idx="1"/>
+          </p:nvPr>
+        </p:nvSpPr>
+        <p:spPr/>
+        <p:txBody>
+          <a:bodyPr wrap="square"/>
+          <a:lstStyle/>
+          <a:p>
+            <a:pPr>
+              <a:defRPr sz="2000"/>
+            </a:pPr>
+            <a:r>
+              <a:t>В: Почему порядок битов p1 p2 d1 p4 d2 d3 d4? — О: синдром напрямую равен номеру ошибочной позиции, таблица поиска не нужна.</a:t>
+            </a:r>
+          </a:p>
+          <a:p>
+            <a:pPr>
+              <a:defRPr sz="2000"/>
+            </a:pPr>
+            <a:r>
+              <a:t>В: Что при двойной ошибке Хэмминга? — О: синдром ненулевой, но ошибка ошибочно «исправляется» в третью позицию, без признака отказа (d_min = 3).</a:t>
+            </a:r>
+          </a:p>
+          <a:p>
+            <a:pPr>
+              <a:defRPr sz="2000"/>
+            </a:pPr>
+            <a:r>
+              <a:t>В: Откуда d_free = 5 у свёрточного кода? — О: кратчайший путь 00→10→01→00 по диаграмме состояний, выход 11|10|11 веса 5.</a:t>
+            </a:r>
+          </a:p>
+          <a:p>
+            <a:pPr>
+              <a:defRPr sz="2000"/>
+            </a:pPr>
+            <a:r>
+              <a:t>В: Почему только жёсткие решения? — О: заданы постановкой; мягкие не моделировались, и их преимущество в цифрах не утверждается.</a:t>
+            </a:r>
+          </a:p>
+        </p:txBody>
+      </p:sp>
+    </p:spTree>
+  </p:cSld>
+  <p:clrMapOvr>
+    <a:masterClrMapping/>
+  </p:clrMapOvr>
+</p:sld>
+</file>
+
+<file path=ppt/slides/slide14.xml><?xml version="1.0" encoding="utf-8"?>
+<p:sld xmlns:a="http://schemas.openxmlformats.org/drawingml/2006/main" xmlns:p="http://schemas.openxmlformats.org/presentationml/2006/main" xmlns:r="http://schemas.openxmlformats.org/officeDocument/2006/relationships">
+  <p:cSld>
+    <p:spTree>
+      <p:nvGrpSpPr>
+        <p:cNvPr id="1" name=""/>
+        <p:cNvGrpSpPr/>
+        <p:nvPr/>
+      </p:nvGrpSpPr>
+      <p:grpSpPr/>
+      <p:sp>
+        <p:nvSpPr>
+          <p:cNvPr id="2" name="Title 1"/>
+          <p:cNvSpPr>
+            <a:spLocks noGrp="1"/>
+          </p:cNvSpPr>
+          <p:nvPr>
+            <p:ph type="title"/>
+          </p:nvPr>
+        </p:nvSpPr>
+        <p:spPr/>
+        <p:txBody>
+          <a:bodyPr/>
+          <a:lstStyle/>
+          <a:p>
+            <a:r>
+              <a:t>Вопросы преподавателя: эксперимент и статистика (вопрос — ответ)</a:t>
+            </a:r>
+          </a:p>
+        </p:txBody>
+      </p:sp>
+      <p:sp>
+        <p:nvSpPr>
+          <p:cNvPr id="3" name="Content Placeholder 2"/>
+          <p:cNvSpPr>
+            <a:spLocks noGrp="1"/>
+          </p:cNvSpPr>
+          <p:nvPr>
+            <p:ph idx="1"/>
+          </p:nvPr>
+        </p:nvSpPr>
+        <p:spPr/>
+        <p:txBody>
+          <a:bodyPr wrap="square"/>
+          <a:lstStyle/>
+          <a:p>
+            <a:pPr>
+              <a:defRPr sz="2000"/>
+            </a:pPr>
+            <a:r>
+              <a:t>В: Зачем σ² делить на R_eff? — О: Eb — энергия на информационный бит; иначе кодирование получило бы «бесплатную» энергию и завышенный выигрыш.</a:t>
+            </a:r>
+          </a:p>
+          <a:p>
+            <a:pPr>
+              <a:defRPr sz="2000"/>
+            </a:pPr>
+            <a:r>
+              <a:t>В: Почему не набрано 100 ошибок при 9–10 дБ? — О: при BER ~10⁻⁷ нужно ~10⁹ бит; вместо фиктивной точности приведены границы 95 %.</a:t>
+            </a:r>
+          </a:p>
+          <a:p>
+            <a:pPr>
+              <a:defRPr sz="2000"/>
+            </a:pPr>
+            <a:r>
+              <a:t>В: Почему интервалы по блокам и пакетам, а не по битам? — О: ошибки внутри блока зависимы; независимая единица — блок (4 бита) или пакет.</a:t>
+            </a:r>
+          </a:p>
+          <a:p>
+            <a:pPr>
+              <a:defRPr sz="2000"/>
+            </a:pPr>
+            <a:r>
+              <a:t>В: Результат воспроизводим? — О: фиксированные seed и независимые потоки SeedSequence; повторный прогон даёт те же счётчики бит-в-бит.</a:t>
+            </a:r>
+          </a:p>
+        </p:txBody>
+      </p:sp>
+    </p:spTree>
+  </p:cSld>
+  <p:clrMapOvr>
+    <a:masterClrMapping/>
+  </p:clrMapOvr>
+</p:sld>
+</file>
+
+<file path=ppt/slides/slide15.xml><?xml version="1.0" encoding="utf-8"?>
+<p:sld xmlns:a="http://schemas.openxmlformats.org/drawingml/2006/main" xmlns:p="http://schemas.openxmlformats.org/presentationml/2006/main" xmlns:r="http://schemas.openxmlformats.org/officeDocument/2006/relationships">
+  <p:cSld>
+    <p:spTree>
+      <p:nvGrpSpPr>
+        <p:cNvPr id="1" name=""/>
+        <p:cNvGrpSpPr/>
+        <p:nvPr/>
+      </p:nvGrpSpPr>
+      <p:grpSpPr/>
+      <p:sp>
+        <p:nvSpPr>
+          <p:cNvPr id="2" name="Title 1"/>
+          <p:cNvSpPr>
+            <a:spLocks noGrp="1"/>
+          </p:cNvSpPr>
+          <p:nvPr>
+            <p:ph type="title"/>
+          </p:nvPr>
+        </p:nvSpPr>
+        <p:spPr/>
+        <p:txBody>
+          <a:bodyPr/>
+          <a:lstStyle/>
+          <a:p>
+            <a:r>
+              <a:t>Вопросы преподавателя: результаты (вопрос — ответ)</a:t>
+            </a:r>
+          </a:p>
+        </p:txBody>
+      </p:sp>
+      <p:sp>
+        <p:nvSpPr>
+          <p:cNvPr id="3" name="Content Placeholder 2"/>
+          <p:cNvSpPr>
+            <a:spLocks noGrp="1"/>
+          </p:cNvSpPr>
+          <p:nvPr>
+            <p:ph idx="1"/>
+          </p:nvPr>
+        </p:nvSpPr>
+        <p:spPr/>
+        <p:txBody>
+          <a:bodyPr wrap="square"/>
+          <a:lstStyle/>
+          <a:p>
+            <a:pPr>
+              <a:defRPr sz="2000"/>
+            </a:pPr>
+            <a:r>
+              <a:t>В: Почему Хэмминг проигрывает при малых Eb/N0? — О: избыточность 7/4 стоит ≈2.43 дБ и не окупается, пока ошибок в блоке много; выигрыш с ~4 дБ.</a:t>
+            </a:r>
+          </a:p>
+          <a:p>
+            <a:pPr>
+              <a:defRPr sz="2000"/>
+            </a:pPr>
+            <a:r>
+              <a:t>В: Почему свёрточный код лучше? — О: память кодера и решение по всей решётке, d_free = 5; цена — скорость ≈1/2 и медленное декодирование.</a:t>
+            </a:r>
+          </a:p>
+          <a:p>
+            <a:pPr>
+              <a:defRPr sz="2000"/>
+            </a:pPr>
+            <a:r>
+              <a:t>В: Насколько точны +1.4 и +0.3 дБ? — О: сетка 0.2 дБ: +1.39 [+1.34; +1.43] и +0.32 [+0.29; +0.34] дБ, bootstrap 10 000 реплик.</a:t>
+            </a:r>
+          </a:p>
+          <a:p>
+            <a:pPr>
+              <a:defRPr sz="2000"/>
+            </a:pPr>
+            <a:r>
+              <a:t>Полный список вопросов и ответов: docs/QUESTIONS.md в репозитории проекта.</a:t>
+            </a:r>
+          </a:p>
+        </p:txBody>
+      </p:sp>
+    </p:spTree>
+  </p:cSld>
+  <p:clrMapOvr>
+    <a:masterClrMapping/>
+  </p:clrMapOvr>
+</p:sld>
+</file>
+
+<file path=ppt/slides/slide16.xml><?xml version="1.0" encoding="utf-8"?>
+<p:sld xmlns:a="http://schemas.openxmlformats.org/drawingml/2006/main" xmlns:p="http://schemas.openxmlformats.org/presentationml/2006/main" xmlns:r="http://schemas.openxmlformats.org/officeDocument/2006/relationships">
+  <p:cSld>
+    <p:spTree>
+      <p:nvGrpSpPr>
+        <p:cNvPr id="1" name=""/>
+        <p:cNvGrpSpPr/>
+        <p:nvPr/>
+      </p:nvGrpSpPr>
+      <p:grpSpPr/>
+      <p:sp>
+        <p:nvSpPr>
+          <p:cNvPr id="2" name="Title 1"/>
+          <p:cNvSpPr>
+            <a:spLocks noGrp="1"/>
+          </p:cNvSpPr>
+          <p:nvPr>
+            <p:ph type="title"/>
+          </p:nvPr>
+        </p:nvSpPr>
+        <p:spPr/>
+        <p:txBody>
+          <a:bodyPr/>
+          <a:lstStyle/>
+          <a:p>
+            <a:r>
               <a:t>Спасибо за внимание!</a:t>
             </a:r>
           </a:p>
@@ -3521,6 +3785,14 @@
             </a:pPr>
             <a:r>
               <a:t>Код, данные, графики и notebook: репозиторий проекта (notebooks/01_research.ipynb — главный документ, 19 разделов).</a:t>
+            </a:r>
+          </a:p>
+          <a:p>
+            <a:pPr>
+              <a:defRPr sz="2000"/>
+            </a:pPr>
+            <a:r>
+              <a:t>Все вопросы и ответы к защите: docs/QUESTIONS.md.</a:t>
             </a:r>
           </a:p>
         </p:txBody>
